--- a/decks/geog-local-place/geog-local-place_ch1_what-is-geography.pptx
+++ b/decks/geog-local-place/geog-local-place_ch1_what-is-geography.pptx
@@ -127,30 +127,30 @@
   <p:extLst>
     <p:ext uri="{521415D9-36F7-43E2-AB2F-B90AF26B5E84}">
       <p14:sectionLst xmlns:p14="http://schemas.microsoft.com/office/powerpoint/2010/main">
-        <p14:section name="Opening" id="{decfdf5e-145c-a50f-1016-6bf91caa22c5}">
+        <p14:section name="Opening" id="{ce52b46f-d035-e5dd-006a-ee48b17334ee}">
           <p14:sldIdLst>
             <p14:sldId id="256"/>
           </p14:sldIdLst>
         </p14:section>
-        <p14:section name="Gate" id="{dc9ee65d-c910-a04d-3fe1-c33fe793d0a8}">
+        <p14:section name="Gate" id="{75e2a7fa-ad13-e978-3932-cb09bc1059c2}">
           <p14:sldIdLst>
             <p14:sldId id="257"/>
             <p14:sldId id="258"/>
           </p14:sldIdLst>
         </p14:section>
-        <p14:section name="Pre-teach" id="{1dc405d3-b8b5-533b-c2e0-9f74529a0e7b}">
+        <p14:section name="Pre-teach" id="{531fd720-b10e-fd68-cdd2-f4c2244bfc85}">
           <p14:sldIdLst>
             <p14:sldId id="259"/>
             <p14:sldId id="260"/>
           </p14:sldIdLst>
         </p14:section>
-        <p14:section name="Read-along" id="{51f83e6b-a79f-7103-66d8-905a408b7305}">
+        <p14:section name="Read-along" id="{38f40044-9d5b-b129-602f-e039e921be64}">
           <p14:sldIdLst>
             <p14:sldId id="261"/>
             <p14:sldId id="262"/>
           </p14:sldIdLst>
         </p14:section>
-        <p14:section name="Teach" id="{82b6be7c-717d-00ec-f0bc-9610e123908d}">
+        <p14:section name="Teach" id="{bc6730f8-9a4c-a46d-52f1-d9c37c9d8626}">
           <p14:sldIdLst>
             <p14:sldId id="263"/>
             <p14:sldId id="264"/>
@@ -160,7 +160,7 @@
             <p14:sldId id="268"/>
           </p14:sldIdLst>
         </p14:section>
-        <p14:section name="Routes" id="{b43fb330-4616-33f7-3af0-f94a7084139a}">
+        <p14:section name="Routes" id="{2111fd95-cec2-4e6a-7a11-ab91638e3ac9}">
           <p14:sldIdLst>
             <p14:sldId id="269"/>
             <p14:sldId id="270"/>
@@ -168,12 +168,12 @@
             <p14:sldId id="272"/>
           </p14:sldIdLst>
         </p14:section>
-        <p14:section name="Close" id="{5116679e-1c6d-83bf-c07e-39a9cb9f86bb}">
+        <p14:section name="Close" id="{324a00bb-0143-a3aa-737b-4530ce165ebd}">
           <p14:sldIdLst>
             <p14:sldId id="273"/>
           </p14:sldIdLst>
         </p14:section>
-        <p14:section name="Answers" id="{fc77e9bc-0edc-720f-2b83-b31751fdc172}">
+        <p14:section name="Answers" id="{283cf69e-e801-a060-2255-0956595709da}">
           <p14:sldIdLst>
             <p14:sldId id="274"/>
             <p14:sldId id="275"/>
@@ -769,7 +769,7 @@
             <a:r>
               <a:rPr lang="en-US" dirty="0"/>
               <a:t>Teach — A geographer asks questions. Say it in your own words, then check understanding with a quick question: ask a pupil from the pre-teach group first, since they met these words and ideas before the lesson. Pupils try to recall before you re-explain.
-Geographers investigate places by asking questions. The deck gives six, and you used them on a photograph of the Fjallsjokull glacier in Iceland. Where is this place? What is it like? Why is it like this? How is it changing? Who is affected by the changes? How do I feel about it? Ask those six about any photograph, any town or any country and you have started a geographical enquiry.
+Geographers investigate places by asking questions. The deck gives six, and you used them on a photograph of the Fjallsjokull glacier in Iceland, which is a good place to start. Where is this place? What is it like? Why is it like this? How is it changing? Who is affected by the changes? How do I feel about it? Ask those six about any photograph, any town or any country and you have started a geographical enquiry.
 Geographers also look at three kinds of factor in every place. Social factors are about people and their way of life. Economic factors are about money and ways to earn money through working, such as businesses and jobs. Environmental factors are about the land, the air and everything that affects them. Together these are called SEE analysis: Social, Economic, Environmental. You will meet SEE in every unit from now until GCSE.
 Geography is happening every minute of the day. Your homework asked you to find a news report and explain why it is geographical. A flood, a new railway, a factory closing, a heatwave: each one is a story about a place, and each one can be sorted as human, physical or environmental and as social, economic or environmental.
 Tip: SEE: Social is people, Economic is money and jobs, Environmental is land and air. Learn the three words in that order.</a:t>
@@ -5264,7 +5264,7 @@
               <a:buNone/>
             </a:pPr>
             <a:r>
-              <a:rPr lang="en-US" sz="2200" dirty="0">
+              <a:rPr lang="en-US" sz="2000" dirty="0">
                 <a:solidFill>
                   <a:srgbClr val="1E2229"/>
                 </a:solidFill>
@@ -5272,9 +5272,9 @@
                 <a:ea typeface="Calibri" pitchFamily="34" charset="-122"/>
                 <a:cs typeface="Calibri" pitchFamily="34" charset="-120"/>
               </a:rPr>
-              <a:t>Geographers investigate places by asking questions. The deck gives six, and you used them on a photograph of the Fjallsjokull glacier in Iceland.</a:t>
-            </a:r>
-            <a:endParaRPr lang="en-US" sz="2200" dirty="0"/>
+              <a:t>Geographers investigate places by asking questions. The deck gives six, and you used them on a photograph of the Fjallsjokull glacier in Iceland, which is a good place to start.</a:t>
+            </a:r>
+            <a:endParaRPr lang="en-US" sz="2000" dirty="0"/>
           </a:p>
         </p:txBody>
       </p:sp>
@@ -5384,7 +5384,7 @@
               <a:buNone/>
             </a:pPr>
             <a:r>
-              <a:rPr lang="en-US" sz="2200" dirty="0">
+              <a:rPr lang="en-US" sz="2000" dirty="0">
                 <a:solidFill>
                   <a:srgbClr val="1E2229"/>
                 </a:solidFill>
@@ -5394,7 +5394,7 @@
               </a:rPr>
               <a:t>Geographers also look at three kinds of factor in every place.</a:t>
             </a:r>
-            <a:endParaRPr lang="en-US" sz="2200" dirty="0"/>
+            <a:endParaRPr lang="en-US" sz="2000" dirty="0"/>
           </a:p>
         </p:txBody>
       </p:sp>
@@ -5504,7 +5504,7 @@
               <a:buNone/>
             </a:pPr>
             <a:r>
-              <a:rPr lang="en-US" sz="2200" dirty="0">
+              <a:rPr lang="en-US" sz="2000" dirty="0">
                 <a:solidFill>
                   <a:srgbClr val="1E2229"/>
                 </a:solidFill>
@@ -5514,7 +5514,7 @@
               </a:rPr>
               <a:t>Geography is happening every minute of the day. Your homework asked you to find a news report and explain why it is geographical.</a:t>
             </a:r>
-            <a:endParaRPr lang="en-US" sz="2200" dirty="0"/>
+            <a:endParaRPr lang="en-US" sz="2000" dirty="0"/>
           </a:p>
         </p:txBody>
       </p:sp>
